--- a/curriculum/unit-2-naming-identity/module-2-3-service-name-workaround.pptx
+++ b/curriculum/unit-2-naming-identity/module-2-3-service-name-workaround.pptx
@@ -1794,7 +1794,7 @@
                 <a:ea typeface="Segoe UI" pitchFamily="34" charset="-122"/>
                 <a:cs typeface="Segoe UI" pitchFamily="34" charset="-120"/>
               </a:rPr>
-              <a:t>Fix Classic-detected services today</a:t>
+              <a:t>Fix SDv1-detected services today</a:t>
             </a:r>
             <a:endParaRPr lang="en-US" sz="2000" dirty="0"/>
           </a:p>
@@ -2070,7 +2070,7 @@
                 <a:ea typeface="Segoe UI" pitchFamily="34" charset="-122"/>
                 <a:cs typeface="Segoe UI" pitchFamily="34" charset="-120"/>
               </a:rPr>
-              <a:t>You have a Classic-detected service named </a:t>
+              <a:t>You have a SDv1-detected service named </a:t>
             </a:r>
             <a:pPr indent="0" marL="0">
               <a:buNone/>
@@ -4273,7 +4273,7 @@
                 <a:ea typeface="Segoe UI" pitchFamily="34" charset="-122"/>
                 <a:cs typeface="Segoe UI" pitchFamily="34" charset="-120"/>
               </a:rPr>
-              <a:t>The prefix makes fragments legible as belonging to one logical service. Classic detection still fragments; the fix makes it query-friendly.</a:t>
+              <a:t>The prefix makes fragments legible as belonging to one logical service. SDv1 detection still fragments; the fix makes it query-friendly.</a:t>
             </a:r>
             <a:endParaRPr lang="en-US" sz="2000" dirty="0"/>
           </a:p>
